--- a/slides/release/10__module9.pptx
+++ b/slides/release/10__module9.pptx
@@ -5738,8 +5738,8 @@
         </p:blipFill>
         <p:spPr>
           <a:xfrm>
-            <a:off x="0" y="914400"/>
-            <a:ext cx="10922000" cy="7454900"/>
+            <a:off x="0" y="869681"/>
+            <a:ext cx="9309052" cy="6353969"/>
           </a:xfrm>
           <a:prstGeom prst="rect">
             <a:avLst/>
@@ -9472,8 +9472,8 @@
         </p:blipFill>
         <p:spPr>
           <a:xfrm>
-            <a:off x="0" y="914400"/>
-            <a:ext cx="11379200" cy="7721600"/>
+            <a:off x="-47291" y="1014819"/>
+            <a:ext cx="9419891" cy="6392069"/>
           </a:xfrm>
           <a:prstGeom prst="rect">
             <a:avLst/>
